--- a/static/img/project_tiles/project_tiles.pptx
+++ b/static/img/project_tiles/project_tiles.pptx
@@ -9,6 +9,7 @@
     <p:sldId id="258" r:id="rId3"/>
     <p:sldId id="257" r:id="rId4"/>
     <p:sldId id="256" r:id="rId5"/>
+    <p:sldId id="260" r:id="rId6"/>
   </p:sldIdLst>
   <p:sldSz cx="12192000" cy="6097588"/>
   <p:notesSz cx="6858000" cy="9144000"/>
@@ -246,7 +247,7 @@
           <a:p>
             <a:fld id="{4BA2E4F8-C044-415E-8912-C024A323E978}" type="datetimeFigureOut">
               <a:rPr lang="en-US" smtClean="0"/>
-              <a:t>8/11/2023</a:t>
+              <a:t>11/25/2023</a:t>
             </a:fld>
             <a:endParaRPr lang="en-US"/>
           </a:p>
@@ -416,7 +417,7 @@
           <a:p>
             <a:fld id="{4BA2E4F8-C044-415E-8912-C024A323E978}" type="datetimeFigureOut">
               <a:rPr lang="en-US" smtClean="0"/>
-              <a:t>8/11/2023</a:t>
+              <a:t>11/25/2023</a:t>
             </a:fld>
             <a:endParaRPr lang="en-US"/>
           </a:p>
@@ -596,7 +597,7 @@
           <a:p>
             <a:fld id="{4BA2E4F8-C044-415E-8912-C024A323E978}" type="datetimeFigureOut">
               <a:rPr lang="en-US" smtClean="0"/>
-              <a:t>8/11/2023</a:t>
+              <a:t>11/25/2023</a:t>
             </a:fld>
             <a:endParaRPr lang="en-US"/>
           </a:p>
@@ -766,7 +767,7 @@
           <a:p>
             <a:fld id="{4BA2E4F8-C044-415E-8912-C024A323E978}" type="datetimeFigureOut">
               <a:rPr lang="en-US" smtClean="0"/>
-              <a:t>8/11/2023</a:t>
+              <a:t>11/25/2023</a:t>
             </a:fld>
             <a:endParaRPr lang="en-US"/>
           </a:p>
@@ -1012,7 +1013,7 @@
           <a:p>
             <a:fld id="{4BA2E4F8-C044-415E-8912-C024A323E978}" type="datetimeFigureOut">
               <a:rPr lang="en-US" smtClean="0"/>
-              <a:t>8/11/2023</a:t>
+              <a:t>11/25/2023</a:t>
             </a:fld>
             <a:endParaRPr lang="en-US"/>
           </a:p>
@@ -1244,7 +1245,7 @@
           <a:p>
             <a:fld id="{4BA2E4F8-C044-415E-8912-C024A323E978}" type="datetimeFigureOut">
               <a:rPr lang="en-US" smtClean="0"/>
-              <a:t>8/11/2023</a:t>
+              <a:t>11/25/2023</a:t>
             </a:fld>
             <a:endParaRPr lang="en-US"/>
           </a:p>
@@ -1611,7 +1612,7 @@
           <a:p>
             <a:fld id="{4BA2E4F8-C044-415E-8912-C024A323E978}" type="datetimeFigureOut">
               <a:rPr lang="en-US" smtClean="0"/>
-              <a:t>8/11/2023</a:t>
+              <a:t>11/25/2023</a:t>
             </a:fld>
             <a:endParaRPr lang="en-US"/>
           </a:p>
@@ -1729,7 +1730,7 @@
           <a:p>
             <a:fld id="{4BA2E4F8-C044-415E-8912-C024A323E978}" type="datetimeFigureOut">
               <a:rPr lang="en-US" smtClean="0"/>
-              <a:t>8/11/2023</a:t>
+              <a:t>11/25/2023</a:t>
             </a:fld>
             <a:endParaRPr lang="en-US"/>
           </a:p>
@@ -1824,7 +1825,7 @@
           <a:p>
             <a:fld id="{4BA2E4F8-C044-415E-8912-C024A323E978}" type="datetimeFigureOut">
               <a:rPr lang="en-US" smtClean="0"/>
-              <a:t>8/11/2023</a:t>
+              <a:t>11/25/2023</a:t>
             </a:fld>
             <a:endParaRPr lang="en-US"/>
           </a:p>
@@ -2101,7 +2102,7 @@
           <a:p>
             <a:fld id="{4BA2E4F8-C044-415E-8912-C024A323E978}" type="datetimeFigureOut">
               <a:rPr lang="en-US" smtClean="0"/>
-              <a:t>8/11/2023</a:t>
+              <a:t>11/25/2023</a:t>
             </a:fld>
             <a:endParaRPr lang="en-US"/>
           </a:p>
@@ -2358,7 +2359,7 @@
           <a:p>
             <a:fld id="{4BA2E4F8-C044-415E-8912-C024A323E978}" type="datetimeFigureOut">
               <a:rPr lang="en-US" smtClean="0"/>
-              <a:t>8/11/2023</a:t>
+              <a:t>11/25/2023</a:t>
             </a:fld>
             <a:endParaRPr lang="en-US"/>
           </a:p>
@@ -2571,7 +2572,7 @@
           <a:p>
             <a:fld id="{4BA2E4F8-C044-415E-8912-C024A323E978}" type="datetimeFigureOut">
               <a:rPr lang="en-US" smtClean="0"/>
-              <a:t>8/11/2023</a:t>
+              <a:t>11/25/2023</a:t>
             </a:fld>
             <a:endParaRPr lang="en-US"/>
           </a:p>
@@ -5058,6 +5059,164 @@
 </p:sld>
 </file>
 
+<file path=ppt/slides/slide5.xml><?xml version="1.0" encoding="utf-8"?>
+<p:sld xmlns:a="http://schemas.openxmlformats.org/drawingml/2006/main" xmlns:r="http://schemas.openxmlformats.org/officeDocument/2006/relationships" xmlns:p="http://schemas.openxmlformats.org/presentationml/2006/main">
+  <p:cSld>
+    <p:spTree>
+      <p:nvGrpSpPr>
+        <p:cNvPr id="1" name=""/>
+        <p:cNvGrpSpPr/>
+        <p:nvPr/>
+      </p:nvGrpSpPr>
+      <p:grpSpPr>
+        <a:xfrm>
+          <a:off x="0" y="0"/>
+          <a:ext cx="0" cy="0"/>
+          <a:chOff x="0" y="0"/>
+          <a:chExt cx="0" cy="0"/>
+        </a:xfrm>
+      </p:grpSpPr>
+      <p:sp>
+        <p:nvSpPr>
+          <p:cNvPr id="64" name="Rectangle: Rounded Corners 63">
+            <a:extLst>
+              <a:ext uri="{FF2B5EF4-FFF2-40B4-BE49-F238E27FC236}">
+                <a16:creationId xmlns:a16="http://schemas.microsoft.com/office/drawing/2014/main" id="{0159ABC9-B814-EE4C-F1BC-C519BA51D723}"/>
+              </a:ext>
+            </a:extLst>
+          </p:cNvPr>
+          <p:cNvSpPr/>
+          <p:nvPr/>
+        </p:nvSpPr>
+        <p:spPr>
+          <a:xfrm>
+            <a:off x="633045" y="555685"/>
+            <a:ext cx="9714523" cy="4986215"/>
+          </a:xfrm>
+          <a:prstGeom prst="roundRect">
+            <a:avLst>
+              <a:gd name="adj" fmla="val 7554"/>
+            </a:avLst>
+          </a:prstGeom>
+          <a:solidFill>
+            <a:schemeClr val="bg1">
+              <a:lumMod val="95000"/>
+              <a:alpha val="30000"/>
+            </a:schemeClr>
+          </a:solidFill>
+          <a:ln>
+            <a:noFill/>
+          </a:ln>
+        </p:spPr>
+        <p:style>
+          <a:lnRef idx="2">
+            <a:schemeClr val="accent1">
+              <a:shade val="15000"/>
+            </a:schemeClr>
+          </a:lnRef>
+          <a:fillRef idx="1">
+            <a:schemeClr val="accent1"/>
+          </a:fillRef>
+          <a:effectRef idx="0">
+            <a:schemeClr val="accent1"/>
+          </a:effectRef>
+          <a:fontRef idx="minor">
+            <a:schemeClr val="lt1"/>
+          </a:fontRef>
+        </p:style>
+        <p:txBody>
+          <a:bodyPr rtlCol="0" anchor="ctr"/>
+          <a:lstStyle/>
+          <a:p>
+            <a:pPr algn="ctr"/>
+            <a:endParaRPr lang="en-US"/>
+          </a:p>
+        </p:txBody>
+      </p:sp>
+      <p:pic>
+        <p:nvPicPr>
+          <p:cNvPr id="3" name="Picture 2">
+            <a:extLst>
+              <a:ext uri="{FF2B5EF4-FFF2-40B4-BE49-F238E27FC236}">
+                <a16:creationId xmlns:a16="http://schemas.microsoft.com/office/drawing/2014/main" id="{B15DB89D-35DD-5D8D-6217-6D8FEBE2B941}"/>
+              </a:ext>
+            </a:extLst>
+          </p:cNvPr>
+          <p:cNvPicPr>
+            <a:picLocks noChangeAspect="1"/>
+          </p:cNvPicPr>
+          <p:nvPr/>
+        </p:nvPicPr>
+        <p:blipFill rotWithShape="1">
+          <a:blip r:embed="rId2">
+            <a:extLst>
+              <a:ext uri="{28A0092B-C50C-407E-A947-70E740481C1C}">
+                <a14:useLocalDpi xmlns:a14="http://schemas.microsoft.com/office/drawing/2010/main" val="0"/>
+              </a:ext>
+            </a:extLst>
+          </a:blip>
+          <a:srcRect t="16662" b="1564"/>
+          <a:stretch/>
+        </p:blipFill>
+        <p:spPr>
+          <a:xfrm>
+            <a:off x="5722320" y="555686"/>
+            <a:ext cx="3810993" cy="4986215"/>
+          </a:xfrm>
+          <a:prstGeom prst="rect">
+            <a:avLst/>
+          </a:prstGeom>
+        </p:spPr>
+      </p:pic>
+      <p:pic>
+        <p:nvPicPr>
+          <p:cNvPr id="5" name="Picture 4">
+            <a:extLst>
+              <a:ext uri="{FF2B5EF4-FFF2-40B4-BE49-F238E27FC236}">
+                <a16:creationId xmlns:a16="http://schemas.microsoft.com/office/drawing/2014/main" id="{EF1AC6E6-F56C-E94F-68B2-892FDCE0A0C8}"/>
+              </a:ext>
+            </a:extLst>
+          </p:cNvPr>
+          <p:cNvPicPr>
+            <a:picLocks noChangeAspect="1"/>
+          </p:cNvPicPr>
+          <p:nvPr/>
+        </p:nvPicPr>
+        <p:blipFill>
+          <a:blip r:embed="rId3">
+            <a:extLst>
+              <a:ext uri="{28A0092B-C50C-407E-A947-70E740481C1C}">
+                <a14:useLocalDpi xmlns:a14="http://schemas.microsoft.com/office/drawing/2010/main" val="0"/>
+              </a:ext>
+            </a:extLst>
+          </a:blip>
+          <a:stretch>
+            <a:fillRect/>
+          </a:stretch>
+        </p:blipFill>
+        <p:spPr>
+          <a:xfrm rot="10800000">
+            <a:off x="1445848" y="555684"/>
+            <a:ext cx="3736968" cy="4986215"/>
+          </a:xfrm>
+          <a:prstGeom prst="rect">
+            <a:avLst/>
+          </a:prstGeom>
+        </p:spPr>
+      </p:pic>
+    </p:spTree>
+    <p:extLst>
+      <p:ext uri="{BB962C8B-B14F-4D97-AF65-F5344CB8AC3E}">
+        <p14:creationId xmlns:p14="http://schemas.microsoft.com/office/powerpoint/2010/main" val="2151547818"/>
+      </p:ext>
+    </p:extLst>
+  </p:cSld>
+  <p:clrMapOvr>
+    <a:masterClrMapping/>
+  </p:clrMapOvr>
+</p:sld>
+</file>
+
 <file path=ppt/theme/theme1.xml><?xml version="1.0" encoding="utf-8"?>
 <a:theme xmlns:a="http://schemas.openxmlformats.org/drawingml/2006/main" name="Office Theme">
   <a:themeElements>
